--- a/발표자료_최종본_v2.pptx
+++ b/발표자료_최종본_v2.pptx
@@ -4172,7 +4172,7 @@
               </a:spcAft>
             </a:pPr>
             <a:r>
-              <a:rPr sz="4400" b="1">
+              <a:rPr sz="3000" b="1">
                 <a:solidFill>
                   <a:srgbClr val="FFFFFF"/>
                 </a:solidFill>
@@ -4211,7 +4211,7 @@
               </a:spcAft>
             </a:pPr>
             <a:r>
-              <a:rPr sz="1800" b="0">
+              <a:rPr sz="2000" b="1">
                 <a:solidFill>
                   <a:srgbClr val="BFD4F0"/>
                 </a:solidFill>
@@ -4250,7 +4250,7 @@
               </a:spcAft>
             </a:pPr>
             <a:r>
-              <a:rPr sz="1600" b="0">
+              <a:rPr sz="1800" b="1">
                 <a:solidFill>
                   <a:srgbClr val="FFFFFF"/>
                 </a:solidFill>
@@ -4307,7 +4307,7 @@
               </a:spcAft>
             </a:pPr>
             <a:r>
-              <a:rPr sz="1400" b="1">
+              <a:rPr sz="1600" b="1">
                 <a:solidFill>
                   <a:srgbClr val="2A78D6"/>
                 </a:solidFill>
@@ -4346,7 +4346,7 @@
               </a:spcAft>
             </a:pPr>
             <a:r>
-              <a:rPr sz="2800" b="1">
+              <a:rPr sz="3000" b="1">
                 <a:solidFill>
                   <a:srgbClr val="104281"/>
                 </a:solidFill>
@@ -4385,7 +4385,7 @@
               </a:spcAft>
             </a:pPr>
             <a:r>
-              <a:rPr sz="1900" b="1">
+              <a:rPr sz="2100" b="1">
                 <a:solidFill>
                   <a:srgbClr val="2A78D6"/>
                 </a:solidFill>
@@ -4424,7 +4424,7 @@
               </a:spcAft>
             </a:pPr>
             <a:r>
-              <a:rPr sz="1550" b="0">
+              <a:rPr sz="1700" b="1">
                 <a:solidFill>
                   <a:srgbClr val="202020"/>
                 </a:solidFill>
@@ -4463,7 +4463,7 @@
               </a:spcAft>
             </a:pPr>
             <a:r>
-              <a:rPr sz="1900" b="1">
+              <a:rPr sz="2100" b="1">
                 <a:solidFill>
                   <a:srgbClr val="2A78D6"/>
                 </a:solidFill>
@@ -4502,7 +4502,7 @@
               </a:spcAft>
             </a:pPr>
             <a:r>
-              <a:rPr sz="1550" b="0">
+              <a:rPr sz="1700" b="1">
                 <a:solidFill>
                   <a:srgbClr val="202020"/>
                 </a:solidFill>
@@ -4541,7 +4541,7 @@
               </a:spcAft>
             </a:pPr>
             <a:r>
-              <a:rPr sz="1900" b="1">
+              <a:rPr sz="2100" b="1">
                 <a:solidFill>
                   <a:srgbClr val="2A78D6"/>
                 </a:solidFill>
@@ -4580,7 +4580,7 @@
               </a:spcAft>
             </a:pPr>
             <a:r>
-              <a:rPr sz="1550" b="0">
+              <a:rPr sz="1700" b="1">
                 <a:solidFill>
                   <a:srgbClr val="202020"/>
                 </a:solidFill>
@@ -4619,7 +4619,7 @@
               </a:spcAft>
             </a:pPr>
             <a:r>
-              <a:rPr sz="1900" b="1">
+              <a:rPr sz="2100" b="1">
                 <a:solidFill>
                   <a:srgbClr val="2A78D6"/>
                 </a:solidFill>
@@ -4658,7 +4658,7 @@
               </a:spcAft>
             </a:pPr>
             <a:r>
-              <a:rPr sz="1550" b="0">
+              <a:rPr sz="1700" b="1">
                 <a:solidFill>
                   <a:srgbClr val="202020"/>
                 </a:solidFill>
@@ -4697,7 +4697,7 @@
               </a:spcAft>
             </a:pPr>
             <a:r>
-              <a:rPr sz="1900" b="1">
+              <a:rPr sz="2100" b="1">
                 <a:solidFill>
                   <a:srgbClr val="2A78D6"/>
                 </a:solidFill>
@@ -4736,7 +4736,7 @@
               </a:spcAft>
             </a:pPr>
             <a:r>
-              <a:rPr sz="1550" b="1">
+              <a:rPr sz="1700" b="1">
                 <a:solidFill>
                   <a:srgbClr val="202020"/>
                 </a:solidFill>
@@ -4775,7 +4775,7 @@
               </a:spcAft>
             </a:pPr>
             <a:r>
-              <a:rPr sz="1900" b="1">
+              <a:rPr sz="2100" b="1">
                 <a:solidFill>
                   <a:srgbClr val="2A78D6"/>
                 </a:solidFill>
@@ -4814,7 +4814,7 @@
               </a:spcAft>
             </a:pPr>
             <a:r>
-              <a:rPr sz="1550" b="1">
+              <a:rPr sz="1700" b="1">
                 <a:solidFill>
                   <a:srgbClr val="202020"/>
                 </a:solidFill>
@@ -4853,7 +4853,7 @@
               </a:spcAft>
             </a:pPr>
             <a:r>
-              <a:rPr sz="1400" b="0">
+              <a:rPr sz="1600" b="1">
                 <a:solidFill>
                   <a:srgbClr val="666666"/>
                 </a:solidFill>
@@ -4992,7 +4992,7 @@
               </a:spcAft>
             </a:pPr>
             <a:r>
-              <a:rPr sz="1400" b="1">
+              <a:rPr sz="1600" b="1">
                 <a:solidFill>
                   <a:srgbClr val="2A78D6"/>
                 </a:solidFill>
@@ -5031,7 +5031,7 @@
               </a:spcAft>
             </a:pPr>
             <a:r>
-              <a:rPr sz="2800" b="1">
+              <a:rPr sz="3000" b="1">
                 <a:solidFill>
                   <a:srgbClr val="104281"/>
                 </a:solidFill>
@@ -5094,7 +5094,7 @@
               </a:spcAft>
             </a:pPr>
             <a:r>
-              <a:rPr sz="1500" b="0">
+              <a:rPr sz="1700" b="1">
                 <a:solidFill>
                   <a:srgbClr val="666666"/>
                 </a:solidFill>
@@ -5110,28 +5110,76 @@
               </a:spcAft>
             </a:pPr>
             <a:r>
+              <a:rPr sz="2100" b="1">
+                <a:solidFill>
+                  <a:srgbClr val="C44E52"/>
+                </a:solidFill>
+                <a:latin typeface="맑은 고딕"/>
+              </a:rPr>
+              <a:t>정상 10,635  &lt;  경도인지장애 11,383</a:t>
+            </a:r>
+          </a:p>
+          <a:p>
+            <a:pPr algn="l">
+              <a:spcAft>
+                <a:spcPts val="600"/>
+              </a:spcAft>
+            </a:pPr>
+            <a:r>
+              <a:rPr sz="1600" b="1">
+                <a:solidFill>
+                  <a:srgbClr val="202020"/>
+                </a:solidFill>
+                <a:latin typeface="맑은 고딕"/>
+              </a:rPr>
+              <a:t/>
+            </a:r>
+          </a:p>
+          <a:p>
+            <a:pPr algn="l">
+              <a:spcAft>
+                <a:spcPts val="600"/>
+              </a:spcAft>
+            </a:pPr>
+            <a:r>
               <a:rPr sz="1900" b="1">
                 <a:solidFill>
-                  <a:srgbClr val="C44E52"/>
-                </a:solidFill>
-                <a:latin typeface="맑은 고딕"/>
-              </a:rPr>
-              <a:t>정상 10,635  &lt;  경도인지장애 11,383</a:t>
-            </a:r>
-          </a:p>
-          <a:p>
-            <a:pPr algn="l">
-              <a:spcAft>
-                <a:spcPts val="600"/>
-              </a:spcAft>
-            </a:pPr>
-            <a:r>
-              <a:rPr sz="1400" b="0">
-                <a:solidFill>
                   <a:srgbClr val="202020"/>
                 </a:solidFill>
                 <a:latin typeface="맑은 고딕"/>
               </a:rPr>
+              <a:t>"활동량이 줄면 위험군"이라는</a:t>
+            </a:r>
+          </a:p>
+          <a:p>
+            <a:pPr algn="l">
+              <a:spcAft>
+                <a:spcPts val="600"/>
+              </a:spcAft>
+            </a:pPr>
+            <a:r>
+              <a:rPr sz="1900" b="1">
+                <a:solidFill>
+                  <a:srgbClr val="202020"/>
+                </a:solidFill>
+                <a:latin typeface="맑은 고딕"/>
+              </a:rPr>
+              <a:t>단순한 가설은 성립하지 않았다</a:t>
+            </a:r>
+          </a:p>
+          <a:p>
+            <a:pPr algn="l">
+              <a:spcAft>
+                <a:spcPts val="600"/>
+              </a:spcAft>
+            </a:pPr>
+            <a:r>
+              <a:rPr sz="1600" b="1">
+                <a:solidFill>
+                  <a:srgbClr val="202020"/>
+                </a:solidFill>
+                <a:latin typeface="맑은 고딕"/>
+              </a:rPr>
               <a:t/>
             </a:r>
           </a:p>
@@ -5142,55 +5190,7 @@
               </a:spcAft>
             </a:pPr>
             <a:r>
-              <a:rPr sz="1700" b="0">
-                <a:solidFill>
-                  <a:srgbClr val="202020"/>
-                </a:solidFill>
-                <a:latin typeface="맑은 고딕"/>
-              </a:rPr>
-              <a:t>"활동량이 줄면 위험군"이라는</a:t>
-            </a:r>
-          </a:p>
-          <a:p>
-            <a:pPr algn="l">
-              <a:spcAft>
-                <a:spcPts val="600"/>
-              </a:spcAft>
-            </a:pPr>
-            <a:r>
-              <a:rPr sz="1700" b="0">
-                <a:solidFill>
-                  <a:srgbClr val="202020"/>
-                </a:solidFill>
-                <a:latin typeface="맑은 고딕"/>
-              </a:rPr>
-              <a:t>단순한 가설은 성립하지 않았다</a:t>
-            </a:r>
-          </a:p>
-          <a:p>
-            <a:pPr algn="l">
-              <a:spcAft>
-                <a:spcPts val="600"/>
-              </a:spcAft>
-            </a:pPr>
-            <a:r>
-              <a:rPr sz="1400" b="0">
-                <a:solidFill>
-                  <a:srgbClr val="202020"/>
-                </a:solidFill>
-                <a:latin typeface="맑은 고딕"/>
-              </a:rPr>
-              <a:t/>
-            </a:r>
-          </a:p>
-          <a:p>
-            <a:pPr algn="l">
-              <a:spcAft>
-                <a:spcPts val="600"/>
-              </a:spcAft>
-            </a:pPr>
-            <a:r>
-              <a:rPr sz="1900" b="1">
+              <a:rPr sz="2100" b="1">
                 <a:solidFill>
                   <a:srgbClr val="104281"/>
                 </a:solidFill>
@@ -5206,7 +5206,7 @@
               </a:spcAft>
             </a:pPr>
             <a:r>
-              <a:rPr sz="1900" b="1">
+              <a:rPr sz="2100" b="1">
                 <a:solidFill>
                   <a:srgbClr val="104281"/>
                 </a:solidFill>
@@ -5222,7 +5222,7 @@
               </a:spcAft>
             </a:pPr>
             <a:r>
-              <a:rPr sz="1900" b="1">
+              <a:rPr sz="2100" b="1">
                 <a:solidFill>
                   <a:srgbClr val="104281"/>
                 </a:solidFill>
@@ -5361,7 +5361,7 @@
               </a:spcAft>
             </a:pPr>
             <a:r>
-              <a:rPr sz="1400" b="1">
+              <a:rPr sz="1600" b="1">
                 <a:solidFill>
                   <a:srgbClr val="2A78D6"/>
                 </a:solidFill>
@@ -5400,7 +5400,7 @@
               </a:spcAft>
             </a:pPr>
             <a:r>
-              <a:rPr sz="2800" b="1">
+              <a:rPr sz="3000" b="1">
                 <a:solidFill>
                   <a:srgbClr val="104281"/>
                 </a:solidFill>
@@ -5463,7 +5463,7 @@
               </a:spcAft>
             </a:pPr>
             <a:r>
-              <a:rPr sz="1500" b="0">
+              <a:rPr sz="1700" b="1">
                 <a:solidFill>
                   <a:srgbClr val="666666"/>
                 </a:solidFill>
@@ -5479,7 +5479,7 @@
               </a:spcAft>
             </a:pPr>
             <a:r>
-              <a:rPr sz="1400" b="0">
+              <a:rPr sz="1600" b="1">
                 <a:solidFill>
                   <a:srgbClr val="202020"/>
                 </a:solidFill>
@@ -5495,7 +5495,7 @@
               </a:spcAft>
             </a:pPr>
             <a:r>
-              <a:rPr sz="1700" b="1">
+              <a:rPr sz="1900" b="1">
                 <a:solidFill>
                   <a:srgbClr val="202020"/>
                 </a:solidFill>
@@ -5511,7 +5511,7 @@
               </a:spcAft>
             </a:pPr>
             <a:r>
-              <a:rPr sz="1700" b="1">
+              <a:rPr sz="1900" b="1">
                 <a:solidFill>
                   <a:srgbClr val="202020"/>
                 </a:solidFill>
@@ -5527,7 +5527,7 @@
               </a:spcAft>
             </a:pPr>
             <a:r>
-              <a:rPr sz="1400" b="0">
+              <a:rPr sz="1600" b="1">
                 <a:solidFill>
                   <a:srgbClr val="202020"/>
                 </a:solidFill>
@@ -5543,7 +5543,7 @@
               </a:spcAft>
             </a:pPr>
             <a:r>
-              <a:rPr sz="1700" b="0">
+              <a:rPr sz="1900" b="1">
                 <a:solidFill>
                   <a:srgbClr val="202020"/>
                 </a:solidFill>
@@ -5559,7 +5559,7 @@
               </a:spcAft>
             </a:pPr>
             <a:r>
-              <a:rPr sz="1700" b="0">
+              <a:rPr sz="1900" b="1">
                 <a:solidFill>
                   <a:srgbClr val="202020"/>
                 </a:solidFill>
@@ -5575,7 +5575,7 @@
               </a:spcAft>
             </a:pPr>
             <a:r>
-              <a:rPr sz="1700" b="0">
+              <a:rPr sz="1900" b="1">
                 <a:solidFill>
                   <a:srgbClr val="202020"/>
                 </a:solidFill>
@@ -5714,7 +5714,7 @@
               </a:spcAft>
             </a:pPr>
             <a:r>
-              <a:rPr sz="1400" b="1">
+              <a:rPr sz="1600" b="1">
                 <a:solidFill>
                   <a:srgbClr val="2A78D6"/>
                 </a:solidFill>
@@ -5753,7 +5753,7 @@
               </a:spcAft>
             </a:pPr>
             <a:r>
-              <a:rPr sz="2800" b="1">
+              <a:rPr sz="3000" b="1">
                 <a:solidFill>
                   <a:srgbClr val="104281"/>
                 </a:solidFill>
@@ -5807,7 +5807,7 @@
                     <a:lstStyle/>
                     <a:p>
                       <a:r>
-                        <a:rPr sz="1500" b="1">
+                        <a:rPr sz="1800" b="1">
                           <a:solidFill>
                             <a:srgbClr val="FFFFFF"/>
                           </a:solidFill>
@@ -5829,7 +5829,7 @@
                     <a:lstStyle/>
                     <a:p>
                       <a:r>
-                        <a:rPr sz="1500" b="1">
+                        <a:rPr sz="1800" b="1">
                           <a:solidFill>
                             <a:srgbClr val="FFFFFF"/>
                           </a:solidFill>
@@ -5851,7 +5851,7 @@
                     <a:lstStyle/>
                     <a:p>
                       <a:r>
-                        <a:rPr sz="1500" b="1">
+                        <a:rPr sz="1800" b="1">
                           <a:solidFill>
                             <a:srgbClr val="FFFFFF"/>
                           </a:solidFill>
@@ -5875,7 +5875,7 @@
                     <a:lstStyle/>
                     <a:p>
                       <a:r>
-                        <a:rPr sz="1500" b="0">
+                        <a:rPr sz="1800" b="1">
                           <a:solidFill>
                             <a:srgbClr val="202020"/>
                           </a:solidFill>
@@ -5897,7 +5897,7 @@
                     <a:lstStyle/>
                     <a:p>
                       <a:r>
-                        <a:rPr sz="1500" b="0">
+                        <a:rPr sz="1800" b="1">
                           <a:solidFill>
                             <a:srgbClr val="202020"/>
                           </a:solidFill>
@@ -5919,7 +5919,7 @@
                     <a:lstStyle/>
                     <a:p>
                       <a:r>
-                        <a:rPr sz="1500" b="0">
+                        <a:rPr sz="1800" b="1">
                           <a:solidFill>
                             <a:srgbClr val="202020"/>
                           </a:solidFill>
@@ -5941,7 +5941,7 @@
                     <a:lstStyle/>
                     <a:p>
                       <a:r>
-                        <a:rPr sz="1500" b="0">
+                        <a:rPr sz="1800" b="1">
                           <a:solidFill>
                             <a:srgbClr val="202020"/>
                           </a:solidFill>
@@ -5965,7 +5965,7 @@
                     <a:lstStyle/>
                     <a:p>
                       <a:r>
-                        <a:rPr sz="1500" b="0">
+                        <a:rPr sz="1800" b="1">
                           <a:solidFill>
                             <a:srgbClr val="202020"/>
                           </a:solidFill>
@@ -5987,7 +5987,7 @@
                     <a:lstStyle/>
                     <a:p>
                       <a:r>
-                        <a:rPr sz="1500" b="0">
+                        <a:rPr sz="1800" b="1">
                           <a:solidFill>
                             <a:srgbClr val="202020"/>
                           </a:solidFill>
@@ -6009,7 +6009,7 @@
                     <a:lstStyle/>
                     <a:p>
                       <a:r>
-                        <a:rPr sz="1500" b="0">
+                        <a:rPr sz="1800" b="1">
                           <a:solidFill>
                             <a:srgbClr val="202020"/>
                           </a:solidFill>
@@ -6031,7 +6031,7 @@
                     <a:lstStyle/>
                     <a:p>
                       <a:r>
-                        <a:rPr sz="1500" b="0">
+                        <a:rPr sz="1800" b="1">
                           <a:solidFill>
                             <a:srgbClr val="202020"/>
                           </a:solidFill>
@@ -6055,7 +6055,7 @@
                     <a:lstStyle/>
                     <a:p>
                       <a:r>
-                        <a:rPr sz="1500" b="1">
+                        <a:rPr sz="1800" b="1">
                           <a:solidFill>
                             <a:srgbClr val="C44E52"/>
                           </a:solidFill>
@@ -6077,7 +6077,7 @@
                     <a:lstStyle/>
                     <a:p>
                       <a:r>
-                        <a:rPr sz="1500" b="1">
+                        <a:rPr sz="1800" b="1">
                           <a:solidFill>
                             <a:srgbClr val="C44E52"/>
                           </a:solidFill>
@@ -6099,7 +6099,7 @@
                     <a:lstStyle/>
                     <a:p>
                       <a:r>
-                        <a:rPr sz="1500" b="1">
+                        <a:rPr sz="1800" b="1">
                           <a:solidFill>
                             <a:srgbClr val="C44E52"/>
                           </a:solidFill>
@@ -6121,7 +6121,7 @@
                     <a:lstStyle/>
                     <a:p>
                       <a:r>
-                        <a:rPr sz="1500" b="1">
+                        <a:rPr sz="1800" b="1">
                           <a:solidFill>
                             <a:srgbClr val="C44E52"/>
                           </a:solidFill>
@@ -6170,24 +6170,24 @@
               </a:spcAft>
             </a:pPr>
             <a:r>
+              <a:rPr sz="1900" b="1">
+                <a:solidFill>
+                  <a:srgbClr val="104281"/>
+                </a:solidFill>
+                <a:latin typeface="맑은 고딕"/>
+              </a:rPr>
+              <a:t>스크리닝의 선택: 정확도 3.6%p를 내주고, 위험군의 절반 이상(52.7%)을 잡는다</a:t>
+            </a:r>
+          </a:p>
+          <a:p>
+            <a:pPr algn="l">
+              <a:spcAft>
+                <a:spcPts val="600"/>
+              </a:spcAft>
+            </a:pPr>
+            <a:r>
               <a:rPr sz="1700" b="1">
                 <a:solidFill>
-                  <a:srgbClr val="104281"/>
-                </a:solidFill>
-                <a:latin typeface="맑은 고딕"/>
-              </a:rPr>
-              <a:t>스크리닝의 선택: 정확도 3.6%p를 내주고, 위험군의 절반 이상(52.7%)을 잡는다</a:t>
-            </a:r>
-          </a:p>
-          <a:p>
-            <a:pPr algn="l">
-              <a:spcAft>
-                <a:spcPts val="600"/>
-              </a:spcAft>
-            </a:pPr>
-            <a:r>
-              <a:rPr sz="1500" b="0">
-                <a:solidFill>
                   <a:srgbClr val="202020"/>
                 </a:solidFill>
                 <a:latin typeface="맑은 고딕"/>
@@ -6202,7 +6202,7 @@
               </a:spcAft>
             </a:pPr>
             <a:r>
-              <a:rPr sz="1500" b="0">
+              <a:rPr sz="1700" b="1">
                 <a:solidFill>
                   <a:srgbClr val="202020"/>
                 </a:solidFill>
@@ -6218,7 +6218,7 @@
               </a:spcAft>
             </a:pPr>
             <a:r>
-              <a:rPr sz="1500" b="0">
+              <a:rPr sz="1700" b="1">
                 <a:solidFill>
                   <a:srgbClr val="202020"/>
                 </a:solidFill>
@@ -6234,7 +6234,7 @@
               </a:spcAft>
             </a:pPr>
             <a:r>
-              <a:rPr sz="1500" b="0">
+              <a:rPr sz="1700" b="1">
                 <a:solidFill>
                   <a:srgbClr val="202020"/>
                 </a:solidFill>
@@ -6250,7 +6250,7 @@
               </a:spcAft>
             </a:pPr>
             <a:r>
-              <a:rPr sz="1500" b="0">
+              <a:rPr sz="1700" b="1">
                 <a:solidFill>
                   <a:srgbClr val="202020"/>
                 </a:solidFill>
@@ -6389,7 +6389,7 @@
               </a:spcAft>
             </a:pPr>
             <a:r>
-              <a:rPr sz="1400" b="1">
+              <a:rPr sz="1600" b="1">
                 <a:solidFill>
                   <a:srgbClr val="2A78D6"/>
                 </a:solidFill>
@@ -6428,7 +6428,7 @@
               </a:spcAft>
             </a:pPr>
             <a:r>
-              <a:rPr sz="2800" b="1">
+              <a:rPr sz="3000" b="1">
                 <a:solidFill>
                   <a:srgbClr val="104281"/>
                 </a:solidFill>
@@ -6467,7 +6467,7 @@
               </a:spcAft>
             </a:pPr>
             <a:r>
-              <a:rPr sz="1700" b="0">
+              <a:rPr sz="1900" b="1">
                 <a:solidFill>
                   <a:srgbClr val="202020"/>
                 </a:solidFill>
@@ -6483,7 +6483,7 @@
               </a:spcAft>
             </a:pPr>
             <a:r>
-              <a:rPr sz="1400" b="0">
+              <a:rPr sz="1600" b="1">
                 <a:solidFill>
                   <a:srgbClr val="202020"/>
                 </a:solidFill>
@@ -6499,7 +6499,7 @@
               </a:spcAft>
             </a:pPr>
             <a:r>
-              <a:rPr sz="1600" b="0">
+              <a:rPr sz="1800" b="1">
                 <a:solidFill>
                   <a:srgbClr val="202020"/>
                 </a:solidFill>
@@ -6515,7 +6515,7 @@
               </a:spcAft>
             </a:pPr>
             <a:r>
-              <a:rPr sz="1600" b="0">
+              <a:rPr sz="1800" b="1">
                 <a:solidFill>
                   <a:srgbClr val="202020"/>
                 </a:solidFill>
@@ -6531,7 +6531,7 @@
               </a:spcAft>
             </a:pPr>
             <a:r>
-              <a:rPr sz="1400" b="0">
+              <a:rPr sz="1600" b="1">
                 <a:solidFill>
                   <a:srgbClr val="202020"/>
                 </a:solidFill>
@@ -6547,29 +6547,61 @@
               </a:spcAft>
             </a:pPr>
             <a:r>
+              <a:rPr sz="2000" b="1">
+                <a:solidFill>
+                  <a:srgbClr val="C44E52"/>
+                </a:solidFill>
+                <a:latin typeface="맑은 고딕"/>
+              </a:rPr>
+              <a:t>세 번 시도, 같은 결론: 경도인지장애 '단독' 조기 신호는 현재 데이터로는 못 찾았다</a:t>
+            </a:r>
+          </a:p>
+          <a:p>
+            <a:pPr algn="l">
+              <a:spcAft>
+                <a:spcPts val="600"/>
+              </a:spcAft>
+            </a:pPr>
+            <a:r>
+              <a:rPr sz="1600" b="1">
+                <a:solidFill>
+                  <a:srgbClr val="202020"/>
+                </a:solidFill>
+                <a:latin typeface="맑은 고딕"/>
+              </a:rPr>
+              <a:t/>
+            </a:r>
+          </a:p>
+          <a:p>
+            <a:pPr algn="l">
+              <a:spcAft>
+                <a:spcPts val="600"/>
+              </a:spcAft>
+            </a:pPr>
+            <a:r>
+              <a:rPr sz="2000" b="1">
+                <a:solidFill>
+                  <a:srgbClr val="104281"/>
+                </a:solidFill>
+                <a:latin typeface="맑은 고딕"/>
+              </a:rPr>
+              <a:t>검증이 실제로 한 일 — 서비스 주장 범위를 바꿨다</a:t>
+            </a:r>
+          </a:p>
+          <a:p>
+            <a:pPr algn="l">
+              <a:spcAft>
+                <a:spcPts val="600"/>
+              </a:spcAft>
+            </a:pPr>
+            <a:r>
               <a:rPr sz="1800" b="1">
                 <a:solidFill>
-                  <a:srgbClr val="C44E52"/>
-                </a:solidFill>
-                <a:latin typeface="맑은 고딕"/>
-              </a:rPr>
-              <a:t>세 번 시도, 같은 결론: 경도인지장애 '단독' 조기 신호는 현재 데이터로는 못 찾았다</a:t>
-            </a:r>
-          </a:p>
-          <a:p>
-            <a:pPr algn="l">
-              <a:spcAft>
-                <a:spcPts val="600"/>
-              </a:spcAft>
-            </a:pPr>
-            <a:r>
-              <a:rPr sz="1400" b="0">
-                <a:solidFill>
                   <a:srgbClr val="202020"/>
                 </a:solidFill>
                 <a:latin typeface="맑은 고딕"/>
               </a:rPr>
-              <a:t/>
+              <a:t>· "경도인지장애를 조기 진단한다"  →  사용 금지</a:t>
             </a:r>
           </a:p>
           <a:p>
@@ -6580,38 +6612,6 @@
             </a:pPr>
             <a:r>
               <a:rPr sz="1800" b="1">
-                <a:solidFill>
-                  <a:srgbClr val="104281"/>
-                </a:solidFill>
-                <a:latin typeface="맑은 고딕"/>
-              </a:rPr>
-              <a:t>검증이 실제로 한 일 — 서비스 주장 범위를 바꿨다</a:t>
-            </a:r>
-          </a:p>
-          <a:p>
-            <a:pPr algn="l">
-              <a:spcAft>
-                <a:spcPts val="600"/>
-              </a:spcAft>
-            </a:pPr>
-            <a:r>
-              <a:rPr sz="1600" b="0">
-                <a:solidFill>
-                  <a:srgbClr val="202020"/>
-                </a:solidFill>
-                <a:latin typeface="맑은 고딕"/>
-              </a:rPr>
-              <a:t>· "경도인지장애를 조기 진단한다"  →  사용 금지</a:t>
-            </a:r>
-          </a:p>
-          <a:p>
-            <a:pPr algn="l">
-              <a:spcAft>
-                <a:spcPts val="600"/>
-              </a:spcAft>
-            </a:pPr>
-            <a:r>
-              <a:rPr sz="1600" b="0">
                 <a:solidFill>
                   <a:srgbClr val="202020"/>
                 </a:solidFill>
@@ -6750,7 +6750,7 @@
               </a:spcAft>
             </a:pPr>
             <a:r>
-              <a:rPr sz="1400" b="1">
+              <a:rPr sz="1600" b="1">
                 <a:solidFill>
                   <a:srgbClr val="2A78D6"/>
                 </a:solidFill>
@@ -6789,7 +6789,7 @@
               </a:spcAft>
             </a:pPr>
             <a:r>
-              <a:rPr sz="2800" b="1">
+              <a:rPr sz="3000" b="1">
                 <a:solidFill>
                   <a:srgbClr val="104281"/>
                 </a:solidFill>
@@ -6852,7 +6852,7 @@
               </a:spcAft>
             </a:pPr>
             <a:r>
-              <a:rPr sz="1500" b="0">
+              <a:rPr sz="1700" b="1">
                 <a:solidFill>
                   <a:srgbClr val="666666"/>
                 </a:solidFill>
@@ -6868,7 +6868,7 @@
               </a:spcAft>
             </a:pPr>
             <a:r>
-              <a:rPr sz="1400" b="0">
+              <a:rPr sz="1600" b="1">
                 <a:solidFill>
                   <a:srgbClr val="202020"/>
                 </a:solidFill>
@@ -6884,7 +6884,7 @@
               </a:spcAft>
             </a:pPr>
             <a:r>
-              <a:rPr sz="1900" b="1">
+              <a:rPr sz="2100" b="1">
                 <a:solidFill>
                   <a:srgbClr val="104281"/>
                 </a:solidFill>
@@ -6900,7 +6900,7 @@
               </a:spcAft>
             </a:pPr>
             <a:r>
-              <a:rPr sz="1500" b="0">
+              <a:rPr sz="1700" b="1">
                 <a:solidFill>
                   <a:srgbClr val="202020"/>
                 </a:solidFill>
@@ -6916,7 +6916,7 @@
               </a:spcAft>
             </a:pPr>
             <a:r>
-              <a:rPr sz="1400" b="0">
+              <a:rPr sz="1600" b="1">
                 <a:solidFill>
                   <a:srgbClr val="202020"/>
                 </a:solidFill>
@@ -6932,7 +6932,7 @@
               </a:spcAft>
             </a:pPr>
             <a:r>
-              <a:rPr sz="1900" b="1">
+              <a:rPr sz="2100" b="1">
                 <a:solidFill>
                   <a:srgbClr val="C44E52"/>
                 </a:solidFill>
@@ -6948,7 +6948,7 @@
               </a:spcAft>
             </a:pPr>
             <a:r>
-              <a:rPr sz="1500" b="0">
+              <a:rPr sz="1700" b="1">
                 <a:solidFill>
                   <a:srgbClr val="202020"/>
                 </a:solidFill>
@@ -6964,7 +6964,7 @@
               </a:spcAft>
             </a:pPr>
             <a:r>
-              <a:rPr sz="1500" b="0">
+              <a:rPr sz="1700" b="1">
                 <a:solidFill>
                   <a:srgbClr val="202020"/>
                 </a:solidFill>
@@ -6980,7 +6980,7 @@
               </a:spcAft>
             </a:pPr>
             <a:r>
-              <a:rPr sz="1500" b="0">
+              <a:rPr sz="1700" b="1">
                 <a:solidFill>
                   <a:srgbClr val="202020"/>
                 </a:solidFill>
@@ -7019,7 +7019,7 @@
               </a:spcAft>
             </a:pPr>
             <a:r>
-              <a:rPr sz="1600" b="1">
+              <a:rPr sz="1800" b="1">
                 <a:solidFill>
                   <a:srgbClr val="104281"/>
                 </a:solidFill>
@@ -7158,7 +7158,7 @@
               </a:spcAft>
             </a:pPr>
             <a:r>
-              <a:rPr sz="1400" b="1">
+              <a:rPr sz="1600" b="1">
                 <a:solidFill>
                   <a:srgbClr val="2A78D6"/>
                 </a:solidFill>
@@ -7197,7 +7197,7 @@
               </a:spcAft>
             </a:pPr>
             <a:r>
-              <a:rPr sz="2800" b="1">
+              <a:rPr sz="3000" b="1">
                 <a:solidFill>
                   <a:srgbClr val="104281"/>
                 </a:solidFill>
@@ -7236,7 +7236,7 @@
               </a:spcAft>
             </a:pPr>
             <a:r>
-              <a:rPr sz="1700" b="1">
+              <a:rPr sz="1900" b="1">
                 <a:solidFill>
                   <a:srgbClr val="104281"/>
                 </a:solidFill>
@@ -7275,7 +7275,7 @@
               </a:spcAft>
             </a:pPr>
             <a:r>
-              <a:rPr sz="1400" b="0">
+              <a:rPr sz="1600" b="1">
                 <a:solidFill>
                   <a:srgbClr val="202020"/>
                 </a:solidFill>
@@ -7314,7 +7314,7 @@
               </a:spcAft>
             </a:pPr>
             <a:r>
-              <a:rPr sz="1700" b="1">
+              <a:rPr sz="1900" b="1">
                 <a:solidFill>
                   <a:srgbClr val="104281"/>
                 </a:solidFill>
@@ -7353,7 +7353,7 @@
               </a:spcAft>
             </a:pPr>
             <a:r>
-              <a:rPr sz="1400" b="0">
+              <a:rPr sz="1600" b="1">
                 <a:solidFill>
                   <a:srgbClr val="202020"/>
                 </a:solidFill>
@@ -7392,7 +7392,7 @@
               </a:spcAft>
             </a:pPr>
             <a:r>
-              <a:rPr sz="1700" b="1">
+              <a:rPr sz="1900" b="1">
                 <a:solidFill>
                   <a:srgbClr val="104281"/>
                 </a:solidFill>
@@ -7431,7 +7431,7 @@
               </a:spcAft>
             </a:pPr>
             <a:r>
-              <a:rPr sz="1400" b="0">
+              <a:rPr sz="1600" b="1">
                 <a:solidFill>
                   <a:srgbClr val="202020"/>
                 </a:solidFill>
@@ -7470,7 +7470,7 @@
               </a:spcAft>
             </a:pPr>
             <a:r>
-              <a:rPr sz="1700" b="1">
+              <a:rPr sz="1900" b="1">
                 <a:solidFill>
                   <a:srgbClr val="104281"/>
                 </a:solidFill>
@@ -7509,7 +7509,7 @@
               </a:spcAft>
             </a:pPr>
             <a:r>
-              <a:rPr sz="1400" b="0">
+              <a:rPr sz="1600" b="1">
                 <a:solidFill>
                   <a:srgbClr val="202020"/>
                 </a:solidFill>
@@ -7548,7 +7548,7 @@
               </a:spcAft>
             </a:pPr>
             <a:r>
-              <a:rPr sz="1700" b="1">
+              <a:rPr sz="1900" b="1">
                 <a:solidFill>
                   <a:srgbClr val="104281"/>
                 </a:solidFill>
@@ -7587,7 +7587,7 @@
               </a:spcAft>
             </a:pPr>
             <a:r>
-              <a:rPr sz="1400" b="0">
+              <a:rPr sz="1600" b="1">
                 <a:solidFill>
                   <a:srgbClr val="202020"/>
                 </a:solidFill>
@@ -7626,7 +7626,7 @@
               </a:spcAft>
             </a:pPr>
             <a:r>
-              <a:rPr sz="1400" b="0">
+              <a:rPr sz="1600" b="1">
                 <a:solidFill>
                   <a:srgbClr val="666666"/>
                 </a:solidFill>
@@ -7765,7 +7765,7 @@
               </a:spcAft>
             </a:pPr>
             <a:r>
-              <a:rPr sz="1400" b="1">
+              <a:rPr sz="1600" b="1">
                 <a:solidFill>
                   <a:srgbClr val="2A78D6"/>
                 </a:solidFill>
@@ -7804,7 +7804,7 @@
               </a:spcAft>
             </a:pPr>
             <a:r>
-              <a:rPr sz="2800" b="1">
+              <a:rPr sz="3000" b="1">
                 <a:solidFill>
                   <a:srgbClr val="104281"/>
                 </a:solidFill>
@@ -7843,7 +7843,7 @@
               </a:spcAft>
             </a:pPr>
             <a:r>
-              <a:rPr sz="1900" b="0">
+              <a:rPr sz="2100" b="1">
                 <a:solidFill>
                   <a:srgbClr val="202020"/>
                 </a:solidFill>
@@ -7859,7 +7859,7 @@
               </a:spcAft>
             </a:pPr>
             <a:r>
-              <a:rPr sz="1400" b="0">
+              <a:rPr sz="1600" b="1">
                 <a:solidFill>
                   <a:srgbClr val="202020"/>
                 </a:solidFill>
@@ -7875,7 +7875,7 @@
               </a:spcAft>
             </a:pPr>
             <a:r>
-              <a:rPr sz="1900" b="0">
+              <a:rPr sz="2100" b="1">
                 <a:solidFill>
                   <a:srgbClr val="202020"/>
                 </a:solidFill>
@@ -7891,7 +7891,7 @@
               </a:spcAft>
             </a:pPr>
             <a:r>
-              <a:rPr sz="1500" b="0">
+              <a:rPr sz="1700" b="1">
                 <a:solidFill>
                   <a:srgbClr val="666666"/>
                 </a:solidFill>
@@ -7907,7 +7907,7 @@
               </a:spcAft>
             </a:pPr>
             <a:r>
-              <a:rPr sz="1400" b="0">
+              <a:rPr sz="1600" b="1">
                 <a:solidFill>
                   <a:srgbClr val="202020"/>
                 </a:solidFill>
@@ -7923,7 +7923,7 @@
               </a:spcAft>
             </a:pPr>
             <a:r>
-              <a:rPr sz="1900" b="0">
+              <a:rPr sz="2100" b="1">
                 <a:solidFill>
                   <a:srgbClr val="202020"/>
                 </a:solidFill>
@@ -7939,7 +7939,7 @@
               </a:spcAft>
             </a:pPr>
             <a:r>
-              <a:rPr sz="1400" b="0">
+              <a:rPr sz="1600" b="1">
                 <a:solidFill>
                   <a:srgbClr val="202020"/>
                 </a:solidFill>
@@ -7955,7 +7955,7 @@
               </a:spcAft>
             </a:pPr>
             <a:r>
-              <a:rPr sz="1400" b="0">
+              <a:rPr sz="1600" b="1">
                 <a:solidFill>
                   <a:srgbClr val="666666"/>
                 </a:solidFill>
@@ -8094,7 +8094,7 @@
               </a:spcAft>
             </a:pPr>
             <a:r>
-              <a:rPr sz="1400" b="1">
+              <a:rPr sz="1600" b="1">
                 <a:solidFill>
                   <a:srgbClr val="2A78D6"/>
                 </a:solidFill>
@@ -8133,7 +8133,7 @@
               </a:spcAft>
             </a:pPr>
             <a:r>
-              <a:rPr sz="2800" b="1">
+              <a:rPr sz="3000" b="1">
                 <a:solidFill>
                   <a:srgbClr val="104281"/>
                 </a:solidFill>
@@ -8316,7 +8316,7 @@
               </a:spcAft>
             </a:pPr>
             <a:r>
-              <a:rPr sz="1400" b="1">
+              <a:rPr sz="1600" b="1">
                 <a:solidFill>
                   <a:srgbClr val="2A78D6"/>
                 </a:solidFill>
@@ -8355,7 +8355,7 @@
               </a:spcAft>
             </a:pPr>
             <a:r>
-              <a:rPr sz="2800" b="1">
+              <a:rPr sz="3000" b="1">
                 <a:solidFill>
                   <a:srgbClr val="104281"/>
                 </a:solidFill>
@@ -8538,7 +8538,7 @@
               </a:spcAft>
             </a:pPr>
             <a:r>
-              <a:rPr sz="1400" b="1">
+              <a:rPr sz="1600" b="1">
                 <a:solidFill>
                   <a:srgbClr val="2A78D6"/>
                 </a:solidFill>
@@ -8577,7 +8577,7 @@
               </a:spcAft>
             </a:pPr>
             <a:r>
-              <a:rPr sz="2800" b="1">
+              <a:rPr sz="3000" b="1">
                 <a:solidFill>
                   <a:srgbClr val="104281"/>
                 </a:solidFill>
@@ -8655,7 +8655,7 @@
               </a:spcAft>
             </a:pPr>
             <a:r>
-              <a:rPr sz="1400" b="0">
+              <a:rPr sz="1600" b="1">
                 <a:solidFill>
                   <a:srgbClr val="666666"/>
                 </a:solidFill>
@@ -8733,7 +8733,7 @@
               </a:spcAft>
             </a:pPr>
             <a:r>
-              <a:rPr sz="1400" b="0">
+              <a:rPr sz="1600" b="1">
                 <a:solidFill>
                   <a:srgbClr val="666666"/>
                 </a:solidFill>
@@ -8811,7 +8811,7 @@
               </a:spcAft>
             </a:pPr>
             <a:r>
-              <a:rPr sz="1400" b="0">
+              <a:rPr sz="1600" b="1">
                 <a:solidFill>
                   <a:srgbClr val="666666"/>
                 </a:solidFill>
@@ -8889,7 +8889,7 @@
               </a:spcAft>
             </a:pPr>
             <a:r>
-              <a:rPr sz="1400" b="0">
+              <a:rPr sz="1600" b="1">
                 <a:solidFill>
                   <a:srgbClr val="666666"/>
                 </a:solidFill>
@@ -8967,7 +8967,7 @@
               </a:spcAft>
             </a:pPr>
             <a:r>
-              <a:rPr sz="1400" b="0">
+              <a:rPr sz="1600" b="1">
                 <a:solidFill>
                   <a:srgbClr val="666666"/>
                 </a:solidFill>
@@ -9045,7 +9045,7 @@
               </a:spcAft>
             </a:pPr>
             <a:r>
-              <a:rPr sz="1400" b="0">
+              <a:rPr sz="1600" b="1">
                 <a:solidFill>
                   <a:srgbClr val="666666"/>
                 </a:solidFill>
@@ -9184,7 +9184,7 @@
               </a:spcAft>
             </a:pPr>
             <a:r>
-              <a:rPr sz="1400" b="1">
+              <a:rPr sz="1600" b="1">
                 <a:solidFill>
                   <a:srgbClr val="2A78D6"/>
                 </a:solidFill>
@@ -9223,7 +9223,7 @@
               </a:spcAft>
             </a:pPr>
             <a:r>
-              <a:rPr sz="2800" b="1">
+              <a:rPr sz="3000" b="1">
                 <a:solidFill>
                   <a:srgbClr val="104281"/>
                 </a:solidFill>
@@ -9262,7 +9262,7 @@
               </a:spcAft>
             </a:pPr>
             <a:r>
-              <a:rPr sz="1800" b="1">
+              <a:rPr sz="2000" b="1">
                 <a:solidFill>
                   <a:srgbClr val="104281"/>
                 </a:solidFill>
@@ -9301,7 +9301,7 @@
               </a:spcAft>
             </a:pPr>
             <a:r>
-              <a:rPr sz="1400" b="0">
+              <a:rPr sz="1600" b="1">
                 <a:solidFill>
                   <a:srgbClr val="202020"/>
                 </a:solidFill>
@@ -9340,7 +9340,7 @@
               </a:spcAft>
             </a:pPr>
             <a:r>
-              <a:rPr sz="1800" b="1">
+              <a:rPr sz="2000" b="1">
                 <a:solidFill>
                   <a:srgbClr val="104281"/>
                 </a:solidFill>
@@ -9379,7 +9379,7 @@
               </a:spcAft>
             </a:pPr>
             <a:r>
-              <a:rPr sz="1400" b="0">
+              <a:rPr sz="1600" b="1">
                 <a:solidFill>
                   <a:srgbClr val="202020"/>
                 </a:solidFill>
@@ -9418,7 +9418,7 @@
               </a:spcAft>
             </a:pPr>
             <a:r>
-              <a:rPr sz="1800" b="1">
+              <a:rPr sz="2000" b="1">
                 <a:solidFill>
                   <a:srgbClr val="104281"/>
                 </a:solidFill>
@@ -9457,7 +9457,7 @@
               </a:spcAft>
             </a:pPr>
             <a:r>
-              <a:rPr sz="1400" b="0">
+              <a:rPr sz="1600" b="1">
                 <a:solidFill>
                   <a:srgbClr val="202020"/>
                 </a:solidFill>
@@ -9496,7 +9496,7 @@
               </a:spcAft>
             </a:pPr>
             <a:r>
-              <a:rPr sz="1800" b="1">
+              <a:rPr sz="2000" b="1">
                 <a:solidFill>
                   <a:srgbClr val="104281"/>
                 </a:solidFill>
@@ -9535,7 +9535,7 @@
               </a:spcAft>
             </a:pPr>
             <a:r>
-              <a:rPr sz="1400" b="0">
+              <a:rPr sz="1600" b="1">
                 <a:solidFill>
                   <a:srgbClr val="202020"/>
                 </a:solidFill>
@@ -9574,7 +9574,7 @@
               </a:spcAft>
             </a:pPr>
             <a:r>
-              <a:rPr sz="1500" b="0">
+              <a:rPr sz="1700" b="1">
                 <a:solidFill>
                   <a:srgbClr val="202020"/>
                 </a:solidFill>
@@ -9590,7 +9590,7 @@
               </a:spcAft>
             </a:pPr>
             <a:r>
-              <a:rPr sz="1900" b="1">
+              <a:rPr sz="2100" b="1">
                 <a:solidFill>
                   <a:srgbClr val="2A78D6"/>
                 </a:solidFill>
@@ -9729,7 +9729,7 @@
               </a:spcAft>
             </a:pPr>
             <a:r>
-              <a:rPr sz="1400" b="1">
+              <a:rPr sz="1600" b="1">
                 <a:solidFill>
                   <a:srgbClr val="2A78D6"/>
                 </a:solidFill>
@@ -9768,7 +9768,7 @@
               </a:spcAft>
             </a:pPr>
             <a:r>
-              <a:rPr sz="2800" b="1">
+              <a:rPr sz="3000" b="1">
                 <a:solidFill>
                   <a:srgbClr val="104281"/>
                 </a:solidFill>
@@ -9807,55 +9807,119 @@
               </a:spcAft>
             </a:pPr>
             <a:r>
+              <a:rPr sz="2000" b="1">
+                <a:solidFill>
+                  <a:srgbClr val="2A78D6"/>
+                </a:solidFill>
+                <a:latin typeface="맑은 고딕"/>
+              </a:rPr>
+              <a:t>확인한 것</a:t>
+            </a:r>
+          </a:p>
+          <a:p>
+            <a:pPr algn="l">
+              <a:spcAft>
+                <a:spcPts val="600"/>
+              </a:spcAft>
+            </a:pPr>
+            <a:r>
               <a:rPr sz="1800" b="1">
                 <a:solidFill>
+                  <a:srgbClr val="202020"/>
+                </a:solidFill>
+                <a:latin typeface="맑은 고딕"/>
+              </a:rPr>
+              <a:t>· 활동량 평균이 아니라 "생활 패턴의 불규칙함"이 위험군을 가른다</a:t>
+            </a:r>
+          </a:p>
+          <a:p>
+            <a:pPr algn="l">
+              <a:spcAft>
+                <a:spcPts val="600"/>
+              </a:spcAft>
+            </a:pPr>
+            <a:r>
+              <a:rPr sz="1800" b="1">
+                <a:solidFill>
+                  <a:srgbClr val="202020"/>
+                </a:solidFill>
+                <a:latin typeface="맑은 고딕"/>
+              </a:rPr>
+              <a:t>· 그 구분 능력은 우연이 아니다 (우연일 확률 0.6%)</a:t>
+            </a:r>
+          </a:p>
+          <a:p>
+            <a:pPr algn="l">
+              <a:spcAft>
+                <a:spcPts val="600"/>
+              </a:spcAft>
+            </a:pPr>
+            <a:r>
+              <a:rPr sz="1600" b="1">
+                <a:solidFill>
+                  <a:srgbClr val="202020"/>
+                </a:solidFill>
+                <a:latin typeface="맑은 고딕"/>
+              </a:rPr>
+              <a:t/>
+            </a:r>
+          </a:p>
+          <a:p>
+            <a:pPr algn="l">
+              <a:spcAft>
+                <a:spcPts val="600"/>
+              </a:spcAft>
+            </a:pPr>
+            <a:r>
+              <a:rPr sz="2000" b="1">
+                <a:solidFill>
                   <a:srgbClr val="2A78D6"/>
                 </a:solidFill>
                 <a:latin typeface="맑은 고딕"/>
               </a:rPr>
-              <a:t>확인한 것</a:t>
-            </a:r>
-          </a:p>
-          <a:p>
-            <a:pPr algn="l">
-              <a:spcAft>
-                <a:spcPts val="600"/>
-              </a:spcAft>
-            </a:pPr>
-            <a:r>
-              <a:rPr sz="1600" b="0">
+              <a:t>한계 — 숨기지 않고 명시</a:t>
+            </a:r>
+          </a:p>
+          <a:p>
+            <a:pPr algn="l">
+              <a:spcAft>
+                <a:spcPts val="600"/>
+              </a:spcAft>
+            </a:pPr>
+            <a:r>
+              <a:rPr sz="1800" b="1">
                 <a:solidFill>
                   <a:srgbClr val="202020"/>
                 </a:solidFill>
                 <a:latin typeface="맑은 고딕"/>
               </a:rPr>
-              <a:t>· 활동량 평균이 아니라 "생활 패턴의 불규칙함"이 위험군을 가른다</a:t>
-            </a:r>
-          </a:p>
-          <a:p>
-            <a:pPr algn="l">
-              <a:spcAft>
-                <a:spcPts val="600"/>
-              </a:spcAft>
-            </a:pPr>
-            <a:r>
-              <a:rPr sz="1600" b="0">
+              <a:t>· 표본 174명(치매 12명), 한 지역(광주)·한 시기 데이터 — 일반화에는 더 큰 데이터 필요</a:t>
+            </a:r>
+          </a:p>
+          <a:p>
+            <a:pPr algn="l">
+              <a:spcAft>
+                <a:spcPts val="600"/>
+              </a:spcAft>
+            </a:pPr>
+            <a:r>
+              <a:rPr sz="1800" b="1">
                 <a:solidFill>
                   <a:srgbClr val="202020"/>
                 </a:solidFill>
                 <a:latin typeface="맑은 고딕"/>
               </a:rPr>
-              <a:t>· 그 구분 능력은 우연이 아니다 (우연일 확률 0.6%)</a:t>
-            </a:r>
-          </a:p>
-          <a:p>
-            <a:pPr algn="l">
-              <a:spcAft>
-                <a:spcPts val="600"/>
-              </a:spcAft>
-            </a:pPr>
-            <a:r>
-              <a:rPr sz="1400" b="0">
+              <a:t>· 경도인지장애 단독 조기 신호는 미확인 · 재현율 수치는 통계적으로 미확정</a:t>
+            </a:r>
+          </a:p>
+          <a:p>
+            <a:pPr algn="l">
+              <a:spcAft>
+                <a:spcPts val="600"/>
+              </a:spcAft>
+            </a:pPr>
+            <a:r>
+              <a:rPr sz="1600" b="1">
                 <a:solidFill>
                   <a:srgbClr val="202020"/>
                 </a:solidFill>
@@ -9871,61 +9935,29 @@
               </a:spcAft>
             </a:pPr>
             <a:r>
+              <a:rPr sz="2000" b="1">
+                <a:solidFill>
+                  <a:srgbClr val="2A78D6"/>
+                </a:solidFill>
+                <a:latin typeface="맑은 고딕"/>
+              </a:rPr>
+              <a:t>그래서 진짜 산출물은</a:t>
+            </a:r>
+          </a:p>
+          <a:p>
+            <a:pPr algn="l">
+              <a:spcAft>
+                <a:spcPts val="600"/>
+              </a:spcAft>
+            </a:pPr>
+            <a:r>
               <a:rPr sz="1800" b="1">
                 <a:solidFill>
-                  <a:srgbClr val="2A78D6"/>
-                </a:solidFill>
-                <a:latin typeface="맑은 고딕"/>
-              </a:rPr>
-              <a:t>한계 — 숨기지 않고 명시</a:t>
-            </a:r>
-          </a:p>
-          <a:p>
-            <a:pPr algn="l">
-              <a:spcAft>
-                <a:spcPts val="600"/>
-              </a:spcAft>
-            </a:pPr>
-            <a:r>
-              <a:rPr sz="1600" b="0">
-                <a:solidFill>
-                  <a:srgbClr val="202020"/>
-                </a:solidFill>
-                <a:latin typeface="맑은 고딕"/>
-              </a:rPr>
-              <a:t>· 표본 174명(치매 12명), 한 지역(광주)·한 시기 데이터 — 일반화에는 더 큰 데이터 필요</a:t>
-            </a:r>
-          </a:p>
-          <a:p>
-            <a:pPr algn="l">
-              <a:spcAft>
-                <a:spcPts val="600"/>
-              </a:spcAft>
-            </a:pPr>
-            <a:r>
-              <a:rPr sz="1600" b="0">
-                <a:solidFill>
-                  <a:srgbClr val="202020"/>
-                </a:solidFill>
-                <a:latin typeface="맑은 고딕"/>
-              </a:rPr>
-              <a:t>· 경도인지장애 단독 조기 신호는 미확인 · 재현율 수치는 통계적으로 미확정</a:t>
-            </a:r>
-          </a:p>
-          <a:p>
-            <a:pPr algn="l">
-              <a:spcAft>
-                <a:spcPts val="600"/>
-              </a:spcAft>
-            </a:pPr>
-            <a:r>
-              <a:rPr sz="1400" b="0">
-                <a:solidFill>
-                  <a:srgbClr val="202020"/>
-                </a:solidFill>
-                <a:latin typeface="맑은 고딕"/>
-              </a:rPr>
-              <a:t/>
+                  <a:srgbClr val="104281"/>
+                </a:solidFill>
+                <a:latin typeface="맑은 고딕"/>
+              </a:rPr>
+              <a:t>· "시험 문제를 미리 본 셈"인 데이터 누수 실수를 스스로 찾아 고치고, 우연 여부까지 검증한 분석 절차</a:t>
             </a:r>
           </a:p>
           <a:p>
@@ -9936,38 +9968,6 @@
             </a:pPr>
             <a:r>
               <a:rPr sz="1800" b="1">
-                <a:solidFill>
-                  <a:srgbClr val="2A78D6"/>
-                </a:solidFill>
-                <a:latin typeface="맑은 고딕"/>
-              </a:rPr>
-              <a:t>그래서 진짜 산출물은</a:t>
-            </a:r>
-          </a:p>
-          <a:p>
-            <a:pPr algn="l">
-              <a:spcAft>
-                <a:spcPts val="600"/>
-              </a:spcAft>
-            </a:pPr>
-            <a:r>
-              <a:rPr sz="1600" b="1">
-                <a:solidFill>
-                  <a:srgbClr val="104281"/>
-                </a:solidFill>
-                <a:latin typeface="맑은 고딕"/>
-              </a:rPr>
-              <a:t>· "시험 문제를 미리 본 셈"인 데이터 누수 실수를 스스로 찾아 고치고, 우연 여부까지 검증한 분석 절차</a:t>
-            </a:r>
-          </a:p>
-          <a:p>
-            <a:pPr algn="l">
-              <a:spcAft>
-                <a:spcPts val="600"/>
-              </a:spcAft>
-            </a:pPr>
-            <a:r>
-              <a:rPr sz="1600" b="1">
                 <a:solidFill>
                   <a:srgbClr val="104281"/>
                 </a:solidFill>
@@ -10106,7 +10106,7 @@
               </a:spcAft>
             </a:pPr>
             <a:r>
-              <a:rPr sz="1400" b="1">
+              <a:rPr sz="1600" b="1">
                 <a:solidFill>
                   <a:srgbClr val="2A78D6"/>
                 </a:solidFill>
@@ -10145,7 +10145,7 @@
               </a:spcAft>
             </a:pPr>
             <a:r>
-              <a:rPr sz="2800" b="1">
+              <a:rPr sz="3000" b="1">
                 <a:solidFill>
                   <a:srgbClr val="104281"/>
                 </a:solidFill>
@@ -10184,7 +10184,7 @@
               </a:spcAft>
             </a:pPr>
             <a:r>
-              <a:rPr sz="1900" b="1">
+              <a:rPr sz="2100" b="1">
                 <a:solidFill>
                   <a:srgbClr val="104281"/>
                 </a:solidFill>
@@ -10200,7 +10200,7 @@
               </a:spcAft>
             </a:pPr>
             <a:r>
-              <a:rPr sz="1600" b="0">
+              <a:rPr sz="1800" b="1">
                 <a:solidFill>
                   <a:srgbClr val="202020"/>
                 </a:solidFill>
@@ -10216,7 +10216,7 @@
               </a:spcAft>
             </a:pPr>
             <a:r>
-              <a:rPr sz="1400" b="0">
+              <a:rPr sz="1600" b="1">
                 <a:solidFill>
                   <a:srgbClr val="202020"/>
                 </a:solidFill>
@@ -10232,7 +10232,7 @@
               </a:spcAft>
             </a:pPr>
             <a:r>
-              <a:rPr sz="1900" b="1">
+              <a:rPr sz="2100" b="1">
                 <a:solidFill>
                   <a:srgbClr val="104281"/>
                 </a:solidFill>
@@ -10248,7 +10248,7 @@
               </a:spcAft>
             </a:pPr>
             <a:r>
-              <a:rPr sz="1600" b="0">
+              <a:rPr sz="1800" b="1">
                 <a:solidFill>
                   <a:srgbClr val="202020"/>
                 </a:solidFill>
@@ -10264,7 +10264,7 @@
               </a:spcAft>
             </a:pPr>
             <a:r>
-              <a:rPr sz="1600" b="0">
+              <a:rPr sz="1800" b="1">
                 <a:solidFill>
                   <a:srgbClr val="202020"/>
                 </a:solidFill>
@@ -10280,7 +10280,7 @@
               </a:spcAft>
             </a:pPr>
             <a:r>
-              <a:rPr sz="1600" b="0">
+              <a:rPr sz="1800" b="1">
                 <a:solidFill>
                   <a:srgbClr val="202020"/>
                 </a:solidFill>
@@ -10296,7 +10296,7 @@
               </a:spcAft>
             </a:pPr>
             <a:r>
-              <a:rPr sz="1400" b="0">
+              <a:rPr sz="1600" b="1">
                 <a:solidFill>
                   <a:srgbClr val="202020"/>
                 </a:solidFill>
@@ -10312,7 +10312,7 @@
               </a:spcAft>
             </a:pPr>
             <a:r>
-              <a:rPr sz="1500" b="0">
+              <a:rPr sz="1700" b="1">
                 <a:solidFill>
                   <a:srgbClr val="666666"/>
                 </a:solidFill>
@@ -10451,7 +10451,7 @@
               </a:spcAft>
             </a:pPr>
             <a:r>
-              <a:rPr sz="4000" b="1">
+              <a:rPr sz="3000" b="1">
                 <a:solidFill>
                   <a:srgbClr val="FFFFFF"/>
                 </a:solidFill>
@@ -10490,7 +10490,7 @@
               </a:spcAft>
             </a:pPr>
             <a:r>
-              <a:rPr sz="1800" b="0">
+              <a:rPr sz="2000" b="1">
                 <a:solidFill>
                   <a:srgbClr val="BFD4F0"/>
                 </a:solidFill>
@@ -10590,7 +10590,7 @@
               </a:spcAft>
             </a:pPr>
             <a:r>
-              <a:rPr sz="1400" b="1">
+              <a:rPr sz="1600" b="1">
                 <a:solidFill>
                   <a:srgbClr val="2A78D6"/>
                 </a:solidFill>
@@ -10629,7 +10629,7 @@
               </a:spcAft>
             </a:pPr>
             <a:r>
-              <a:rPr sz="2800" b="1">
+              <a:rPr sz="3000" b="1">
                 <a:solidFill>
                   <a:srgbClr val="104281"/>
                 </a:solidFill>
@@ -10792,7 +10792,7 @@
               </a:spcAft>
             </a:pPr>
             <a:r>
-              <a:rPr sz="1400" b="1">
+              <a:rPr sz="1600" b="1">
                 <a:solidFill>
                   <a:srgbClr val="2A78D6"/>
                 </a:solidFill>
@@ -10831,7 +10831,7 @@
               </a:spcAft>
             </a:pPr>
             <a:r>
-              <a:rPr sz="2800" b="1">
+              <a:rPr sz="3000" b="1">
                 <a:solidFill>
                   <a:srgbClr val="104281"/>
                 </a:solidFill>
@@ -10994,7 +10994,7 @@
               </a:spcAft>
             </a:pPr>
             <a:r>
-              <a:rPr sz="1400" b="1">
+              <a:rPr sz="1600" b="1">
                 <a:solidFill>
                   <a:srgbClr val="2A78D6"/>
                 </a:solidFill>
@@ -11033,7 +11033,7 @@
               </a:spcAft>
             </a:pPr>
             <a:r>
-              <a:rPr sz="2800" b="1">
+              <a:rPr sz="3000" b="1">
                 <a:solidFill>
                   <a:srgbClr val="104281"/>
                 </a:solidFill>
@@ -11072,7 +11072,7 @@
               </a:spcAft>
             </a:pPr>
             <a:r>
-              <a:rPr sz="1500" b="1">
+              <a:rPr sz="1700" b="1">
                 <a:solidFill>
                   <a:srgbClr val="C44E52"/>
                 </a:solidFill>
@@ -11259,7 +11259,7 @@
               </a:spcAft>
             </a:pPr>
             <a:r>
-              <a:rPr sz="1400" b="1">
+              <a:rPr sz="1600" b="1">
                 <a:solidFill>
                   <a:srgbClr val="2A78D6"/>
                 </a:solidFill>
@@ -11298,7 +11298,7 @@
               </a:spcAft>
             </a:pPr>
             <a:r>
-              <a:rPr sz="2800" b="1">
+              <a:rPr sz="3000" b="1">
                 <a:solidFill>
                   <a:srgbClr val="104281"/>
                 </a:solidFill>
@@ -11361,7 +11361,7 @@
               </a:spcAft>
             </a:pPr>
             <a:r>
-              <a:rPr sz="1500" b="1">
+              <a:rPr sz="1700" b="1">
                 <a:solidFill>
                   <a:srgbClr val="C44E52"/>
                 </a:solidFill>
@@ -11500,7 +11500,7 @@
               </a:spcAft>
             </a:pPr>
             <a:r>
-              <a:rPr sz="1400" b="1">
+              <a:rPr sz="1600" b="1">
                 <a:solidFill>
                   <a:srgbClr val="2A78D6"/>
                 </a:solidFill>
@@ -11539,7 +11539,7 @@
               </a:spcAft>
             </a:pPr>
             <a:r>
-              <a:rPr sz="2800" b="1">
+              <a:rPr sz="3000" b="1">
                 <a:solidFill>
                   <a:srgbClr val="104281"/>
                 </a:solidFill>
@@ -11578,7 +11578,7 @@
               </a:spcAft>
             </a:pPr>
             <a:r>
-              <a:rPr sz="1800" b="0">
+              <a:rPr sz="2000" b="1">
                 <a:solidFill>
                   <a:srgbClr val="202020"/>
                 </a:solidFill>
@@ -11594,7 +11594,7 @@
               </a:spcAft>
             </a:pPr>
             <a:r>
-              <a:rPr sz="1800" b="0">
+              <a:rPr sz="2000" b="1">
                 <a:solidFill>
                   <a:srgbClr val="202020"/>
                 </a:solidFill>
@@ -11610,7 +11610,7 @@
               </a:spcAft>
             </a:pPr>
             <a:r>
-              <a:rPr sz="1800" b="0">
+              <a:rPr sz="2000" b="1">
                 <a:solidFill>
                   <a:srgbClr val="202020"/>
                 </a:solidFill>
@@ -11626,7 +11626,7 @@
               </a:spcAft>
             </a:pPr>
             <a:r>
-              <a:rPr sz="1400" b="0">
+              <a:rPr sz="1600" b="1">
                 <a:solidFill>
                   <a:srgbClr val="202020"/>
                 </a:solidFill>
@@ -11674,7 +11674,7 @@
               </a:spcAft>
             </a:pPr>
             <a:r>
-              <a:rPr sz="1400" b="0">
+              <a:rPr sz="1600" b="1">
                 <a:solidFill>
                   <a:srgbClr val="202020"/>
                 </a:solidFill>
@@ -11690,7 +11690,7 @@
               </a:spcAft>
             </a:pPr>
             <a:r>
-              <a:rPr sz="1500" b="0">
+              <a:rPr sz="1700" b="1">
                 <a:solidFill>
                   <a:srgbClr val="666666"/>
                 </a:solidFill>
@@ -11829,7 +11829,7 @@
               </a:spcAft>
             </a:pPr>
             <a:r>
-              <a:rPr sz="1400" b="1">
+              <a:rPr sz="1600" b="1">
                 <a:solidFill>
                   <a:srgbClr val="2A78D6"/>
                 </a:solidFill>
@@ -11868,7 +11868,7 @@
               </a:spcAft>
             </a:pPr>
             <a:r>
-              <a:rPr sz="2800" b="1">
+              <a:rPr sz="3000" b="1">
                 <a:solidFill>
                   <a:srgbClr val="104281"/>
                 </a:solidFill>
@@ -11908,7 +11908,7 @@
                     <a:lstStyle/>
                     <a:p>
                       <a:r>
-                        <a:rPr sz="1700" b="1">
+                        <a:rPr sz="1800" b="1">
                           <a:solidFill>
                             <a:srgbClr val="104281"/>
                           </a:solidFill>
@@ -11930,7 +11930,7 @@
                     <a:lstStyle/>
                     <a:p>
                       <a:r>
-                        <a:rPr sz="1600" b="0">
+                        <a:rPr sz="1800" b="1">
                           <a:solidFill>
                             <a:srgbClr val="202020"/>
                           </a:solidFill>
@@ -11954,7 +11954,7 @@
                     <a:lstStyle/>
                     <a:p>
                       <a:r>
-                        <a:rPr sz="1700" b="1">
+                        <a:rPr sz="1800" b="1">
                           <a:solidFill>
                             <a:srgbClr val="104281"/>
                           </a:solidFill>
@@ -11976,7 +11976,7 @@
                     <a:lstStyle/>
                     <a:p>
                       <a:r>
-                        <a:rPr sz="1600" b="0">
+                        <a:rPr sz="1800" b="1">
                           <a:solidFill>
                             <a:srgbClr val="202020"/>
                           </a:solidFill>
@@ -12000,7 +12000,7 @@
                     <a:lstStyle/>
                     <a:p>
                       <a:r>
-                        <a:rPr sz="1700" b="1">
+                        <a:rPr sz="1800" b="1">
                           <a:solidFill>
                             <a:srgbClr val="104281"/>
                           </a:solidFill>
@@ -12022,7 +12022,7 @@
                     <a:lstStyle/>
                     <a:p>
                       <a:r>
-                        <a:rPr sz="1600" b="0">
+                        <a:rPr sz="1800" b="1">
                           <a:solidFill>
                             <a:srgbClr val="202020"/>
                           </a:solidFill>
@@ -12046,7 +12046,7 @@
                     <a:lstStyle/>
                     <a:p>
                       <a:r>
-                        <a:rPr sz="1700" b="1">
+                        <a:rPr sz="1800" b="1">
                           <a:solidFill>
                             <a:srgbClr val="104281"/>
                           </a:solidFill>
@@ -12068,7 +12068,7 @@
                     <a:lstStyle/>
                     <a:p>
                       <a:r>
-                        <a:rPr sz="1600" b="0">
+                        <a:rPr sz="1800" b="1">
                           <a:solidFill>
                             <a:srgbClr val="202020"/>
                           </a:solidFill>
@@ -12092,7 +12092,7 @@
                     <a:lstStyle/>
                     <a:p>
                       <a:r>
-                        <a:rPr sz="1700" b="1">
+                        <a:rPr sz="1800" b="1">
                           <a:solidFill>
                             <a:srgbClr val="104281"/>
                           </a:solidFill>
@@ -12114,7 +12114,7 @@
                     <a:lstStyle/>
                     <a:p>
                       <a:r>
-                        <a:rPr sz="1600" b="0">
+                        <a:rPr sz="1800" b="1">
                           <a:solidFill>
                             <a:srgbClr val="202020"/>
                           </a:solidFill>
@@ -12263,7 +12263,7 @@
               </a:spcAft>
             </a:pPr>
             <a:r>
-              <a:rPr sz="1400" b="1">
+              <a:rPr sz="1600" b="1">
                 <a:solidFill>
                   <a:srgbClr val="2A78D6"/>
                 </a:solidFill>
@@ -12302,7 +12302,7 @@
               </a:spcAft>
             </a:pPr>
             <a:r>
-              <a:rPr sz="2800" b="1">
+              <a:rPr sz="3000" b="1">
                 <a:solidFill>
                   <a:srgbClr val="104281"/>
                 </a:solidFill>
@@ -12341,7 +12341,7 @@
               </a:spcAft>
             </a:pPr>
             <a:r>
-              <a:rPr sz="1800" b="0">
+              <a:rPr sz="2000" b="1">
                 <a:solidFill>
                   <a:srgbClr val="202020"/>
                 </a:solidFill>
@@ -12357,7 +12357,7 @@
               </a:spcAft>
             </a:pPr>
             <a:r>
-              <a:rPr sz="1800" b="0">
+              <a:rPr sz="2000" b="1">
                 <a:solidFill>
                   <a:srgbClr val="202020"/>
                 </a:solidFill>
@@ -12373,7 +12373,7 @@
               </a:spcAft>
             </a:pPr>
             <a:r>
-              <a:rPr sz="1800" b="0">
+              <a:rPr sz="2000" b="1">
                 <a:solidFill>
                   <a:srgbClr val="202020"/>
                 </a:solidFill>
@@ -12389,7 +12389,7 @@
               </a:spcAft>
             </a:pPr>
             <a:r>
-              <a:rPr sz="1400" b="0">
+              <a:rPr sz="1600" b="1">
                 <a:solidFill>
                   <a:srgbClr val="202020"/>
                 </a:solidFill>
@@ -12421,7 +12421,7 @@
               </a:spcAft>
             </a:pPr>
             <a:r>
-              <a:rPr sz="1400" b="0">
+              <a:rPr sz="1600" b="1">
                 <a:solidFill>
                   <a:srgbClr val="202020"/>
                 </a:solidFill>
@@ -12437,7 +12437,7 @@
               </a:spcAft>
             </a:pPr>
             <a:r>
-              <a:rPr sz="1500" b="0">
+              <a:rPr sz="1700" b="1">
                 <a:solidFill>
                   <a:srgbClr val="666666"/>
                 </a:solidFill>

--- a/발표자료_최종본_v2.pptx
+++ b/발표자료_최종본_v2.pptx
@@ -5764,17 +5764,56 @@
           </a:p>
         </p:txBody>
       </p:sp>
+      <p:sp>
+        <p:nvSpPr>
+          <p:cNvPr id="7" name="TextBox 6"/>
+          <p:cNvSpPr txBox="1"/>
+          <p:nvPr/>
+        </p:nvSpPr>
+        <p:spPr>
+          <a:xfrm>
+            <a:off x="11475720" y="6446520"/>
+            <a:ext cx="640080" cy="320040"/>
+          </a:xfrm>
+          <a:prstGeom prst="rect">
+            <a:avLst/>
+          </a:prstGeom>
+          <a:noFill/>
+        </p:spPr>
+        <p:txBody>
+          <a:bodyPr wrap="square">
+            <a:spAutoFit/>
+          </a:bodyPr>
+          <a:lstStyle/>
+          <a:p>
+            <a:pPr algn="r">
+              <a:spcAft>
+                <a:spcPts val="600"/>
+              </a:spcAft>
+            </a:pPr>
+            <a:r>
+              <a:rPr sz="1200" b="0">
+                <a:solidFill>
+                  <a:srgbClr val="666666"/>
+                </a:solidFill>
+                <a:latin typeface="맑은 고딕"/>
+              </a:rPr>
+              <a:t>13</a:t>
+            </a:r>
+          </a:p>
+        </p:txBody>
+      </p:sp>
       <p:graphicFrame>
         <p:nvGraphicFramePr>
-          <p:cNvPr id="5" name="Table 4"/>
+          <p:cNvPr id="8" name="Table 7"/>
           <p:cNvGraphicFramePr>
             <a:graphicFrameLocks noGrp="1"/>
           </p:cNvGraphicFramePr>
           <p:nvPr/>
         </p:nvGraphicFramePr>
         <p:xfrm>
-          <a:off x="731520" y="1737360"/>
-          <a:ext cx="10728960" cy="2377440"/>
+          <a:off x="731520" y="1645920"/>
+          <a:ext cx="12778740" cy="2194560"/>
         </p:xfrm>
         <a:graphic>
           <a:graphicData uri="http://schemas.openxmlformats.org/drawingml/2006/table">
@@ -5783,12 +5822,12 @@
                 <a:tableStyleId>{5C22544A-7EE6-4342-B048-85BDC9FD1C3A}</a:tableStyleId>
               </a:tblPr>
               <a:tblGrid>
-                <a:gridCol w="3992228"/>
-                <a:gridCol w="2245577"/>
-                <a:gridCol w="2245577"/>
-                <a:gridCol w="2245578"/>
+                <a:gridCol w="4754880"/>
+                <a:gridCol w="2674620"/>
+                <a:gridCol w="2674620"/>
+                <a:gridCol w="2674620"/>
               </a:tblGrid>
-              <a:tr h="594360">
+              <a:tr h="548640">
                 <a:tc>
                   <a:txBody>
                     <a:bodyPr/>
@@ -5807,7 +5846,7 @@
                     <a:lstStyle/>
                     <a:p>
                       <a:r>
-                        <a:rPr sz="1800" b="1">
+                        <a:rPr sz="1700" b="1">
                           <a:solidFill>
                             <a:srgbClr val="FFFFFF"/>
                           </a:solidFill>
@@ -5829,13 +5868,13 @@
                     <a:lstStyle/>
                     <a:p>
                       <a:r>
-                        <a:rPr sz="1800" b="1">
+                        <a:rPr sz="1700" b="1">
                           <a:solidFill>
                             <a:srgbClr val="FFFFFF"/>
                           </a:solidFill>
                           <a:latin typeface="맑은 고딕"/>
                         </a:rPr>
-                        <a:t>위험군을 찾아낸 비율</a:t>
+                        <a:t>위험군 재현율</a:t>
                       </a:r>
                     </a:p>
                   </a:txBody>
@@ -5851,13 +5890,13 @@
                     <a:lstStyle/>
                     <a:p>
                       <a:r>
-                        <a:rPr sz="1800" b="1">
+                        <a:rPr sz="1700" b="1">
                           <a:solidFill>
                             <a:srgbClr val="FFFFFF"/>
                           </a:solidFill>
                           <a:latin typeface="맑은 고딕"/>
                         </a:rPr>
-                        <a:t>구분 능력 점수</a:t>
+                        <a:t>AUC</a:t>
                       </a:r>
                     </a:p>
                   </a:txBody>
@@ -5868,20 +5907,20 @@
                   </a:tcPr>
                 </a:tc>
               </a:tr>
-              <a:tr h="594360">
+              <a:tr h="548640">
                 <a:tc>
                   <a:txBody>
                     <a:bodyPr/>
                     <a:lstStyle/>
                     <a:p>
                       <a:r>
-                        <a:rPr sz="1800" b="1">
+                        <a:rPr sz="1600" b="1">
                           <a:solidFill>
                             <a:srgbClr val="202020"/>
                           </a:solidFill>
                           <a:latin typeface="맑은 고딕"/>
                         </a:rPr>
-                        <a:t>아무 분석 없이 전부 "정상" 응답</a:t>
+                        <a:t>무조건 "정상" 예측 (베이스라인)</a:t>
                       </a:r>
                     </a:p>
                   </a:txBody>
@@ -5897,7 +5936,7 @@
                     <a:lstStyle/>
                     <a:p>
                       <a:r>
-                        <a:rPr sz="1800" b="1">
+                        <a:rPr sz="1600" b="1">
                           <a:solidFill>
                             <a:srgbClr val="202020"/>
                           </a:solidFill>
@@ -5919,7 +5958,7 @@
                     <a:lstStyle/>
                     <a:p>
                       <a:r>
-                        <a:rPr sz="1800" b="1">
+                        <a:rPr sz="1600" b="1">
                           <a:solidFill>
                             <a:srgbClr val="202020"/>
                           </a:solidFill>
@@ -5941,13 +5980,13 @@
                     <a:lstStyle/>
                     <a:p>
                       <a:r>
-                        <a:rPr sz="1800" b="1">
+                        <a:rPr sz="1600" b="1">
                           <a:solidFill>
                             <a:srgbClr val="202020"/>
                           </a:solidFill>
                           <a:latin typeface="맑은 고딕"/>
                         </a:rPr>
-                        <a:t>0.5 (동전 던지기)</a:t>
+                        <a:t>0.5</a:t>
                       </a:r>
                     </a:p>
                   </a:txBody>
@@ -5958,20 +5997,20 @@
                   </a:tcPr>
                 </a:tc>
               </a:tr>
-              <a:tr h="594360">
+              <a:tr h="548640">
                 <a:tc>
                   <a:txBody>
                     <a:bodyPr/>
                     <a:lstStyle/>
                     <a:p>
                       <a:r>
-                        <a:rPr sz="1800" b="1">
+                        <a:rPr sz="1600" b="1">
                           <a:solidFill>
                             <a:srgbClr val="202020"/>
                           </a:solidFill>
                           <a:latin typeface="맑은 고딕"/>
                         </a:rPr>
-                        <a:t>복잡한 모델 (랜덤포레스트, 교체 전)</a:t>
+                        <a:t>RandomForest (교체 전)</a:t>
                       </a:r>
                     </a:p>
                   </a:txBody>
@@ -5987,7 +6026,7 @@
                     <a:lstStyle/>
                     <a:p>
                       <a:r>
-                        <a:rPr sz="1800" b="1">
+                        <a:rPr sz="1600" b="1">
                           <a:solidFill>
                             <a:srgbClr val="202020"/>
                           </a:solidFill>
@@ -6009,7 +6048,7 @@
                     <a:lstStyle/>
                     <a:p>
                       <a:r>
-                        <a:rPr sz="1800" b="1">
+                        <a:rPr sz="1600" b="1">
                           <a:solidFill>
                             <a:srgbClr val="202020"/>
                           </a:solidFill>
@@ -6031,7 +6070,7 @@
                     <a:lstStyle/>
                     <a:p>
                       <a:r>
-                        <a:rPr sz="1800" b="1">
+                        <a:rPr sz="1600" b="1">
                           <a:solidFill>
                             <a:srgbClr val="202020"/>
                           </a:solidFill>
@@ -6048,20 +6087,20 @@
                   </a:tcPr>
                 </a:tc>
               </a:tr>
-              <a:tr h="594360">
+              <a:tr h="548640">
                 <a:tc>
                   <a:txBody>
                     <a:bodyPr/>
                     <a:lstStyle/>
                     <a:p>
                       <a:r>
-                        <a:rPr sz="1800" b="1">
+                        <a:rPr sz="1600" b="1">
                           <a:solidFill>
                             <a:srgbClr val="C44E52"/>
                           </a:solidFill>
                           <a:latin typeface="맑은 고딕"/>
                         </a:rPr>
-                        <a:t>단순한 모델 (로지스틱 회귀, 최종 채택)</a:t>
+                        <a:t>로지스틱 회귀 (최종)</a:t>
                       </a:r>
                     </a:p>
                   </a:txBody>
@@ -6077,7 +6116,7 @@
                     <a:lstStyle/>
                     <a:p>
                       <a:r>
-                        <a:rPr sz="1800" b="1">
+                        <a:rPr sz="1600" b="1">
                           <a:solidFill>
                             <a:srgbClr val="C44E52"/>
                           </a:solidFill>
@@ -6099,7 +6138,7 @@
                     <a:lstStyle/>
                     <a:p>
                       <a:r>
-                        <a:rPr sz="1800" b="1">
+                        <a:rPr sz="1600" b="1">
                           <a:solidFill>
                             <a:srgbClr val="C44E52"/>
                           </a:solidFill>
@@ -6121,7 +6160,7 @@
                     <a:lstStyle/>
                     <a:p>
                       <a:r>
-                        <a:rPr sz="1800" b="1">
+                        <a:rPr sz="1600" b="1">
                           <a:solidFill>
                             <a:srgbClr val="C44E52"/>
                           </a:solidFill>
@@ -6144,14 +6183,14 @@
       </p:graphicFrame>
       <p:sp>
         <p:nvSpPr>
-          <p:cNvPr id="6" name="TextBox 5"/>
+          <p:cNvPr id="9" name="TextBox 8"/>
           <p:cNvSpPr txBox="1"/>
           <p:nvPr/>
         </p:nvSpPr>
         <p:spPr>
           <a:xfrm>
-            <a:off x="822960" y="4480560"/>
-            <a:ext cx="10698480" cy="2011680"/>
+            <a:off x="822960" y="4343400"/>
+            <a:ext cx="10698480" cy="2194560"/>
           </a:xfrm>
           <a:prstGeom prst="rect">
             <a:avLst/>
@@ -6164,13 +6203,13 @@
           </a:bodyPr>
           <a:lstStyle/>
           <a:p>
-            <a:pPr algn="l">
-              <a:spcAft>
-                <a:spcPts val="600"/>
-              </a:spcAft>
-            </a:pPr>
-            <a:r>
-              <a:rPr sz="1900" b="1">
+            <a:pPr>
+              <a:spcAft>
+                <a:spcPts val="500"/>
+              </a:spcAft>
+            </a:pPr>
+            <a:r>
+              <a:rPr sz="1800" b="1">
                 <a:solidFill>
                   <a:srgbClr val="104281"/>
                 </a:solidFill>
@@ -6180,122 +6219,51 @@
             </a:r>
           </a:p>
           <a:p>
-            <a:pPr algn="l">
-              <a:spcAft>
-                <a:spcPts val="600"/>
-              </a:spcAft>
-            </a:pPr>
-            <a:r>
-              <a:rPr sz="1700" b="1">
+            <a:pPr>
+              <a:spcAft>
+                <a:spcPts val="500"/>
+              </a:spcAft>
+            </a:pPr>
+            <a:r>
+              <a:rPr sz="1600" b="1">
                 <a:solidFill>
                   <a:srgbClr val="202020"/>
                 </a:solidFill>
                 <a:latin typeface="맑은 고딕"/>
               </a:rPr>
-              <a:t>· 위험군을 놓치면 → 병원 갈 기회 상실  /  정상인을 안내하면 → 무료 검진 한 번</a:t>
-            </a:r>
-          </a:p>
-          <a:p>
-            <a:pPr algn="l">
-              <a:spcAft>
-                <a:spcPts val="600"/>
-              </a:spcAft>
-            </a:pPr>
-            <a:r>
-              <a:rPr sz="1700" b="1">
+              <a:t>· 위험군을 놓치면 병원 갈 기회 상실 — 정상인 안내는 무료 검진 한 번</a:t>
+            </a:r>
+          </a:p>
+          <a:p>
+            <a:pPr>
+              <a:spcAft>
+                <a:spcPts val="500"/>
+              </a:spcAft>
+            </a:pPr>
+            <a:r>
+              <a:rPr sz="1600" b="1">
                 <a:solidFill>
                   <a:srgbClr val="202020"/>
                 </a:solidFill>
                 <a:latin typeface="맑은 고딕"/>
               </a:rPr>
-              <a:t>· 로지스틱 회귀: 생활 지표마다 중요도를 매겨 점수를 합산 → "위험군일 확률 몇 %"로 답하는 가장 기본적인 예측 모델</a:t>
-            </a:r>
-          </a:p>
-          <a:p>
-            <a:pPr algn="l">
-              <a:spcAft>
-                <a:spcPts val="600"/>
-              </a:spcAft>
-            </a:pPr>
-            <a:r>
-              <a:rPr sz="1700" b="1">
+              <a:t>· 주 지표는 임계값에 안 묶이는 AUC (의료 스크리닝의 관례)</a:t>
+            </a:r>
+          </a:p>
+          <a:p>
+            <a:pPr>
+              <a:spcAft>
+                <a:spcPts val="500"/>
+              </a:spcAft>
+            </a:pPr>
+            <a:r>
+              <a:rPr sz="1600" b="1">
                 <a:solidFill>
                   <a:srgbClr val="202020"/>
                 </a:solidFill>
                 <a:latin typeface="맑은 고딕"/>
               </a:rPr>
-              <a:t>· 랜덤포레스트: 예/아니오 질문을 이어가는 판단 나무 수백 그루의 다수결 — 유연하지만 작은 데이터에선 잡음까지 외운다</a:t>
-            </a:r>
-          </a:p>
-          <a:p>
-            <a:pPr algn="l">
-              <a:spcAft>
-                <a:spcPts val="600"/>
-              </a:spcAft>
-            </a:pPr>
-            <a:r>
-              <a:rPr sz="1700" b="1">
-                <a:solidFill>
-                  <a:srgbClr val="202020"/>
-                </a:solidFill>
-                <a:latin typeface="맑은 고딕"/>
-              </a:rPr>
-              <a:t>· 구분 능력 점수(AUC): 0.5면 동전 던지기, 1이면 완벽 — 의료 스크리닝의 표준 지표</a:t>
-            </a:r>
-          </a:p>
-          <a:p>
-            <a:pPr algn="l">
-              <a:spcAft>
-                <a:spcPts val="600"/>
-              </a:spcAft>
-            </a:pPr>
-            <a:r>
-              <a:rPr sz="1700" b="1">
-                <a:solidFill>
-                  <a:srgbClr val="202020"/>
-                </a:solidFill>
-                <a:latin typeface="맑은 고딕"/>
-              </a:rPr>
-              <a:t>· 174명의 작은 데이터에선 복잡한 모델보다 단순한 모델이 더 안정적이었다 — 3종 비교로 확인</a:t>
-            </a:r>
-          </a:p>
-        </p:txBody>
-      </p:sp>
-      <p:sp>
-        <p:nvSpPr>
-          <p:cNvPr id="7" name="TextBox 6"/>
-          <p:cNvSpPr txBox="1"/>
-          <p:nvPr/>
-        </p:nvSpPr>
-        <p:spPr>
-          <a:xfrm>
-            <a:off x="11475720" y="6446520"/>
-            <a:ext cx="640080" cy="320040"/>
-          </a:xfrm>
-          <a:prstGeom prst="rect">
-            <a:avLst/>
-          </a:prstGeom>
-          <a:noFill/>
-        </p:spPr>
-        <p:txBody>
-          <a:bodyPr wrap="square">
-            <a:spAutoFit/>
-          </a:bodyPr>
-          <a:lstStyle/>
-          <a:p>
-            <a:pPr algn="r">
-              <a:spcAft>
-                <a:spcPts val="600"/>
-              </a:spcAft>
-            </a:pPr>
-            <a:r>
-              <a:rPr sz="1200" b="0">
-                <a:solidFill>
-                  <a:srgbClr val="666666"/>
-                </a:solidFill>
-                <a:latin typeface="맑은 고딕"/>
-              </a:rPr>
-              <a:t>13</a:t>
+              <a:t>· 소표본에선 단순한 로지스틱 회귀가 랜덤포레스트보다 안정적 — 3종 비교로 확인</a:t>
             </a:r>
           </a:p>
         </p:txBody>
